--- a/tests/patterns/fixtures/pptx-field-outline-projection.pptx
+++ b/tests/patterns/fixtures/pptx-field-outline-projection.pptx
@@ -40,8 +40,8 @@
           <a:bodyPr wrap="none" lIns="0" rIns="0" tIns="0" bIns="0"/>
           <a:lstStyle/>
           <a:p>
-            <a:pPr>
-              <a:defRPr sz="4800" b="1">
+            <a:fld id="{0FBB9679-570D-4509-9600-E07789CF24BB}" type="datetime">
+              <a:rPr sz="4800" b="1">
                 <a:pattFill prst="pct50">
                   <a:fgClr>
                     <a:srgbClr val="D21D54"/>
@@ -51,10 +51,7 @@
                   </a:bgClr>
                 </a:pattFill>
                 <a:latin typeface="Arial"/>
-              </a:defRPr>
-            </a:pPr>
-            <a:fld id="{0FBB9679-570D-4509-9600-E07789CF24BB}" type="datetime">
-              <a:rPr/>
+              </a:rPr>
               <a:t>MMMMMMMM</a:t>
             </a:fld>
           </a:p>
@@ -115,9 +112,10 @@
         </p:spPr>
         <p:txBody>
           <a:bodyPr wrap="none" lIns="0" rIns="0" tIns="0" bIns="0"/>
-          <a:lstStyle>
-            <a:lvl1pPr>
-              <a:defRPr sz="4800" b="1">
+          <a:lstStyle/>
+          <a:p>
+            <a:fld id="{0FBB9679-570D-4509-9600-E07789CF24BB}" type="datetime">
+              <a:rPr sz="4800" b="1">
                 <a:pattFill prst="dnDiag">
                   <a:fgClr>
                     <a:srgbClr val="D21D54"/>
@@ -127,12 +125,7 @@
                   </a:bgClr>
                 </a:pattFill>
                 <a:latin typeface="Arial"/>
-              </a:defRPr>
-            </a:lvl1pPr>
-          </a:lstStyle>
-          <a:p>
-            <a:fld id="{0FBB9679-570D-4509-9600-E07789CF24BB}" type="datetime">
-              <a:rPr/>
+              </a:rPr>
               <a:t>MMMMMMMM</a:t>
             </a:fld>
           </a:p>
